--- a/dist/초3/영어/듣기와말하기/초3_영어_듣기와말하기_02_이름묻고답하기.pptx
+++ b/dist/초3/영어/듣기와말하기/초3_영어_듣기와말하기_02_이름묻고답하기.pptx
@@ -120,20 +120,20 @@
   <p:extLst>
     <p:ext uri="{521415D9-36F7-43E2-AB2F-B90AF26B5E84}">
       <p14:sectionLst xmlns:p14="http://schemas.microsoft.com/office/powerpoint/2010/main">
-        <p14:section name="도입" id="{520f1c9c-da0d-fc18-c310-ee6c7fab2933}">
+        <p14:section name="도입" id="{dc195b36-0c5a-e2a5-e132-f4d4db4ecfcb}">
           <p14:sldIdLst>
             <p14:sldId id="256"/>
             <p14:sldId id="257"/>
           </p14:sldIdLst>
         </p14:section>
-        <p14:section name="개념" id="{0c5c6e6a-5fa7-15ed-71e2-bd504287539e}">
+        <p14:section name="개념" id="{bbf094a3-cdf5-89f5-f3d6-3818c65a692e}">
           <p14:sldIdLst>
             <p14:sldId id="258"/>
             <p14:sldId id="259"/>
             <p14:sldId id="260"/>
           </p14:sldIdLst>
         </p14:section>
-        <p14:section name="연습" id="{a92315d4-40a5-ca12-2cca-fe90bd493184}">
+        <p14:section name="연습" id="{0f0e1566-e0c2-ae7a-d97b-a2cc18e29c50}">
           <p14:sldIdLst>
             <p14:sldId id="261"/>
             <p14:sldId id="262"/>
@@ -141,19 +141,19 @@
             <p14:sldId id="264"/>
           </p14:sldIdLst>
         </p14:section>
-        <p14:section name="확인" id="{26a0c83e-0fd2-df6a-adcf-c1c3042cd581}">
+        <p14:section name="확인" id="{1a35846b-8f02-4d71-0548-52db1461e7c1}">
           <p14:sldIdLst>
             <p14:sldId id="265"/>
             <p14:sldId id="266"/>
             <p14:sldId id="267"/>
           </p14:sldIdLst>
         </p14:section>
-        <p14:section name="정리" id="{99c851e8-8861-472a-6510-46e462ecd22c}">
+        <p14:section name="정리" id="{3349afba-80a6-eae8-c7b7-7281042eaf78}">
           <p14:sldIdLst>
             <p14:sldId id="268"/>
           </p14:sldIdLst>
         </p14:section>
-        <p14:section name="보충" id="{2946f6b9-d80a-8e95-036c-4c047c1da9a2}">
+        <p14:section name="보충" id="{d39dd206-55ad-7973-6425-73e34bf6d6da}">
           <p14:sldIdLst>
             <p14:sldId id="269"/>
           </p14:sldIdLst>
@@ -3074,7 +3074,7 @@
               <a:buNone/>
             </a:pPr>
             <a:r>
-              <a:rPr lang="ko-KR" altLang="en-US" sz="3400" b="1" dirty="0">
+              <a:rPr lang="en-US" altLang="ko-KR" sz="3400" b="1" dirty="0">
                 <a:solidFill>
                   <a:srgbClr val="1F2937"/>
                 </a:solidFill>
@@ -3121,7 +3121,7 @@
               <a:buNone/>
             </a:pPr>
             <a:r>
-              <a:rPr lang="ko-KR" altLang="en-US" sz="3400" b="1" dirty="0">
+              <a:rPr lang="en-US" altLang="ko-KR" sz="3400" b="1" dirty="0">
                 <a:solidFill>
                   <a:srgbClr val="1F2937"/>
                 </a:solidFill>
@@ -3862,7 +3862,7 @@
               <a:buNone/>
             </a:pPr>
             <a:r>
-              <a:rPr lang="ko-KR" altLang="en-US" sz="3000" dirty="0">
+              <a:rPr lang="en-US" altLang="ko-KR" sz="3000" dirty="0">
                 <a:solidFill>
                   <a:srgbClr val="1F2937"/>
                 </a:solidFill>
@@ -3901,7 +3901,7 @@
               <a:buNone/>
             </a:pPr>
             <a:r>
-              <a:rPr lang="ko-KR" altLang="en-US" sz="3000" dirty="0">
+              <a:rPr lang="en-US" altLang="ko-KR" sz="3000" dirty="0">
                 <a:solidFill>
                   <a:srgbClr val="1F2937"/>
                 </a:solidFill>
@@ -3918,7 +3918,7 @@
               <a:buNone/>
             </a:pPr>
             <a:r>
-              <a:rPr lang="ko-KR" altLang="en-US" sz="3000" dirty="0">
+              <a:rPr lang="en-US" altLang="ko-KR" sz="3000" dirty="0">
                 <a:solidFill>
                   <a:srgbClr val="1F2937"/>
                 </a:solidFill>
@@ -3957,7 +3957,7 @@
               <a:buNone/>
             </a:pPr>
             <a:r>
-              <a:rPr lang="ko-KR" altLang="en-US" sz="3000" dirty="0">
+              <a:rPr lang="en-US" altLang="ko-KR" sz="3000" dirty="0">
                 <a:solidFill>
                   <a:srgbClr val="1F2937"/>
                 </a:solidFill>
@@ -4043,7 +4043,7 @@
               <a:buNone/>
             </a:pPr>
             <a:r>
-              <a:rPr lang="ko-KR" altLang="en-US" sz="3000" dirty="0">
+              <a:rPr lang="ko-KR" altLang="en-US" sz="2400" dirty="0">
                 <a:solidFill>
                   <a:srgbClr val="1F2937"/>
                 </a:solidFill>
@@ -4053,14 +4053,14 @@
               </a:rPr>
               <a:t>이름 질문에</a:t>
             </a:r>
-            <a:endParaRPr lang="ko-KR" sz="3000" dirty="0"/>
+            <a:endParaRPr lang="ko-KR" sz="2400" dirty="0"/>
           </a:p>
           <a:p>
             <a:pPr eaLnBrk="0" algn="l" indent="0" marL="0">
               <a:buNone/>
             </a:pPr>
             <a:r>
-              <a:rPr lang="ko-KR" altLang="en-US" sz="3000" dirty="0">
+              <a:rPr lang="ko-KR" altLang="en-US" sz="2400" dirty="0">
                 <a:solidFill>
                   <a:srgbClr val="1F2937"/>
                 </a:solidFill>
@@ -4070,7 +4070,7 @@
               </a:rPr>
               <a:t>I'm fine, thank you.로 대답</a:t>
             </a:r>
-            <a:endParaRPr lang="ko-KR" sz="3000" dirty="0"/>
+            <a:endParaRPr lang="ko-KR" sz="2400" dirty="0"/>
           </a:p>
         </p:txBody>
       </p:sp>
@@ -4398,7 +4398,7 @@
               <a:buNone/>
             </a:pPr>
             <a:r>
-              <a:rPr lang="ko-KR" altLang="en-US" sz="3000" dirty="0">
+              <a:rPr lang="en-US" altLang="ko-KR" sz="3000" dirty="0">
                 <a:solidFill>
                   <a:srgbClr val="1F2937"/>
                 </a:solidFill>
@@ -4514,7 +4514,7 @@
               <a:buNone/>
             </a:pPr>
             <a:r>
-              <a:rPr lang="ko-KR" altLang="en-US" sz="3000" dirty="0">
+              <a:rPr lang="en-US" altLang="ko-KR" sz="3000" dirty="0">
                 <a:solidFill>
                   <a:srgbClr val="1F2937"/>
                 </a:solidFill>
@@ -4630,7 +4630,7 @@
               <a:buNone/>
             </a:pPr>
             <a:r>
-              <a:rPr lang="ko-KR" altLang="en-US" sz="3000" dirty="0">
+              <a:rPr lang="en-US" altLang="ko-KR" sz="3000" dirty="0">
                 <a:solidFill>
                   <a:srgbClr val="1F2937"/>
                 </a:solidFill>
@@ -4746,7 +4746,7 @@
               <a:buNone/>
             </a:pPr>
             <a:r>
-              <a:rPr lang="ko-KR" altLang="en-US" sz="3000" dirty="0">
+              <a:rPr lang="en-US" altLang="ko-KR" sz="3000" dirty="0">
                 <a:solidFill>
                   <a:srgbClr val="1F2937"/>
                 </a:solidFill>
@@ -5468,7 +5468,7 @@
               <a:buNone/>
             </a:pPr>
             <a:r>
-              <a:rPr lang="ko-KR" altLang="en-US" sz="3400" b="1" dirty="0">
+              <a:rPr lang="en-US" altLang="ko-KR" sz="3400" b="1" dirty="0">
                 <a:solidFill>
                   <a:srgbClr val="1F2937"/>
                 </a:solidFill>
@@ -5532,7 +5532,7 @@
               <a:buNone/>
             </a:pPr>
             <a:r>
-              <a:rPr lang="ko-KR" altLang="en-US" sz="3400" b="1" dirty="0">
+              <a:rPr lang="en-US" altLang="ko-KR" sz="3400" b="1" dirty="0">
                 <a:solidFill>
                   <a:srgbClr val="1F2937"/>
                 </a:solidFill>
@@ -5596,7 +5596,7 @@
               <a:buNone/>
             </a:pPr>
             <a:r>
-              <a:rPr lang="ko-KR" altLang="en-US" sz="3400" b="1" dirty="0">
+              <a:rPr lang="en-US" altLang="ko-KR" sz="3400" b="1" dirty="0">
                 <a:solidFill>
                   <a:srgbClr val="1F2937"/>
                 </a:solidFill>
@@ -5660,7 +5660,7 @@
               <a:buNone/>
             </a:pPr>
             <a:r>
-              <a:rPr lang="ko-KR" altLang="en-US" sz="3400" b="1" dirty="0">
+              <a:rPr lang="en-US" altLang="ko-KR" sz="3400" b="1" dirty="0">
                 <a:solidFill>
                   <a:srgbClr val="1F2937"/>
                 </a:solidFill>
@@ -6232,7 +6232,7 @@
               <a:buNone/>
             </a:pPr>
             <a:r>
-              <a:rPr lang="ko-KR" altLang="en-US" sz="3400" b="1" dirty="0">
+              <a:rPr lang="en-US" altLang="ko-KR" sz="3400" b="1" dirty="0">
                 <a:solidFill>
                   <a:srgbClr val="1F2937"/>
                 </a:solidFill>
@@ -6479,7 +6479,7 @@
               <a:buNone/>
             </a:pPr>
             <a:r>
-              <a:rPr lang="ko-KR" altLang="en-US" sz="3400" b="1" dirty="0">
+              <a:rPr lang="en-US" altLang="ko-KR" sz="3400" b="1" dirty="0">
                 <a:solidFill>
                   <a:srgbClr val="1F2937"/>
                 </a:solidFill>
@@ -6543,7 +6543,7 @@
               <a:buNone/>
             </a:pPr>
             <a:r>
-              <a:rPr lang="ko-KR" altLang="en-US" sz="3400" b="1" dirty="0">
+              <a:rPr lang="en-US" altLang="ko-KR" sz="3400" b="1" dirty="0">
                 <a:solidFill>
                   <a:srgbClr val="1F2937"/>
                 </a:solidFill>
@@ -6790,7 +6790,7 @@
               <a:buNone/>
             </a:pPr>
             <a:r>
-              <a:rPr lang="ko-KR" altLang="en-US" sz="3400" b="1" dirty="0">
+              <a:rPr lang="en-US" altLang="ko-KR" sz="3400" b="1" dirty="0">
                 <a:solidFill>
                   <a:srgbClr val="1F2937"/>
                 </a:solidFill>
@@ -6854,7 +6854,7 @@
               <a:buNone/>
             </a:pPr>
             <a:r>
-              <a:rPr lang="ko-KR" altLang="en-US" sz="3400" b="1" dirty="0">
+              <a:rPr lang="en-US" altLang="ko-KR" sz="3400" b="1" dirty="0">
                 <a:solidFill>
                   <a:srgbClr val="1F2937"/>
                 </a:solidFill>
@@ -7096,7 +7096,7 @@
               <a:buNone/>
             </a:pPr>
             <a:r>
-              <a:rPr lang="ko-KR" altLang="en-US" sz="3000" dirty="0">
+              <a:rPr lang="en-US" altLang="ko-KR" sz="3000" dirty="0">
                 <a:solidFill>
                   <a:srgbClr val="1F2937"/>
                 </a:solidFill>
@@ -7119,7 +7119,7 @@
               <a:buNone/>
             </a:pPr>
             <a:r>
-              <a:rPr lang="ko-KR" altLang="en-US" sz="3000" dirty="0">
+              <a:rPr lang="en-US" altLang="ko-KR" sz="3000" dirty="0">
                 <a:solidFill>
                   <a:srgbClr val="1F2937"/>
                 </a:solidFill>
@@ -7142,7 +7142,7 @@
               <a:buNone/>
             </a:pPr>
             <a:r>
-              <a:rPr lang="ko-KR" altLang="en-US" sz="3000" dirty="0">
+              <a:rPr lang="en-US" altLang="ko-KR" sz="3000" dirty="0">
                 <a:solidFill>
                   <a:srgbClr val="1F2937"/>
                 </a:solidFill>
@@ -7165,7 +7165,7 @@
               <a:buNone/>
             </a:pPr>
             <a:r>
-              <a:rPr lang="ko-KR" altLang="en-US" sz="3000" dirty="0">
+              <a:rPr lang="en-US" altLang="ko-KR" sz="3000" dirty="0">
                 <a:solidFill>
                   <a:srgbClr val="1F2937"/>
                 </a:solidFill>
@@ -7188,7 +7188,7 @@
               <a:buNone/>
             </a:pPr>
             <a:r>
-              <a:rPr lang="ko-KR" altLang="en-US" sz="3000" dirty="0">
+              <a:rPr lang="en-US" altLang="ko-KR" sz="3000" dirty="0">
                 <a:solidFill>
                   <a:srgbClr val="1F2937"/>
                 </a:solidFill>
@@ -7427,7 +7427,7 @@
               <a:buNone/>
             </a:pPr>
             <a:r>
-              <a:rPr lang="ko-KR" altLang="en-US" sz="3000" dirty="0">
+              <a:rPr lang="en-US" altLang="ko-KR" sz="3000" dirty="0">
                 <a:solidFill>
                   <a:srgbClr val="1F2937"/>
                 </a:solidFill>
@@ -7513,7 +7513,7 @@
               <a:buNone/>
             </a:pPr>
             <a:r>
-              <a:rPr lang="ko-KR" altLang="en-US" sz="3000" dirty="0">
+              <a:rPr lang="en-US" altLang="ko-KR" sz="3000" dirty="0">
                 <a:solidFill>
                   <a:srgbClr val="1F2937"/>
                 </a:solidFill>
@@ -7599,7 +7599,7 @@
               <a:buNone/>
             </a:pPr>
             <a:r>
-              <a:rPr lang="ko-KR" altLang="en-US" sz="3000" dirty="0">
+              <a:rPr lang="en-US" altLang="ko-KR" sz="3000" dirty="0">
                 <a:solidFill>
                   <a:srgbClr val="1F2937"/>
                 </a:solidFill>
@@ -7945,7 +7945,7 @@
               <a:buNone/>
             </a:pPr>
             <a:r>
-              <a:rPr lang="ko-KR" altLang="en-US" sz="3400" b="1" dirty="0">
+              <a:rPr lang="en-US" altLang="ko-KR" sz="3400" b="1" dirty="0">
                 <a:solidFill>
                   <a:srgbClr val="1F2937"/>
                 </a:solidFill>
@@ -8039,7 +8039,7 @@
               <a:buNone/>
             </a:pPr>
             <a:r>
-              <a:rPr lang="ko-KR" altLang="en-US" sz="3400" b="1" dirty="0">
+              <a:rPr lang="en-US" altLang="ko-KR" sz="3400" b="1" dirty="0">
                 <a:solidFill>
                   <a:srgbClr val="1F2937"/>
                 </a:solidFill>
@@ -8347,7 +8347,7 @@
               <a:buNone/>
             </a:pPr>
             <a:r>
-              <a:rPr lang="ko-KR" altLang="en-US" sz="3000" dirty="0">
+              <a:rPr lang="en-US" altLang="ko-KR" sz="3000" dirty="0">
                 <a:solidFill>
                   <a:srgbClr val="1F2937"/>
                 </a:solidFill>
@@ -8364,7 +8364,7 @@
               <a:buNone/>
             </a:pPr>
             <a:r>
-              <a:rPr lang="ko-KR" altLang="en-US" sz="3000" dirty="0">
+              <a:rPr lang="en-US" altLang="ko-KR" sz="3000" dirty="0">
                 <a:solidFill>
                   <a:srgbClr val="1F2937"/>
                 </a:solidFill>
@@ -8450,7 +8450,7 @@
               <a:buNone/>
             </a:pPr>
             <a:r>
-              <a:rPr lang="ko-KR" altLang="en-US" sz="3000" dirty="0">
+              <a:rPr lang="en-US" altLang="ko-KR" sz="3000" dirty="0">
                 <a:solidFill>
                   <a:srgbClr val="1F2937"/>
                 </a:solidFill>
@@ -8467,7 +8467,7 @@
               <a:buNone/>
             </a:pPr>
             <a:r>
-              <a:rPr lang="ko-KR" altLang="en-US" sz="3000" dirty="0">
+              <a:rPr lang="en-US" altLang="ko-KR" sz="3000" dirty="0">
                 <a:solidFill>
                   <a:srgbClr val="1F2937"/>
                 </a:solidFill>
@@ -8553,7 +8553,7 @@
               <a:buNone/>
             </a:pPr>
             <a:r>
-              <a:rPr lang="ko-KR" altLang="en-US" sz="3000" dirty="0">
+              <a:rPr lang="en-US" altLang="ko-KR" sz="3000" dirty="0">
                 <a:solidFill>
                   <a:srgbClr val="1F2937"/>
                 </a:solidFill>
@@ -8570,7 +8570,7 @@
               <a:buNone/>
             </a:pPr>
             <a:r>
-              <a:rPr lang="ko-KR" altLang="en-US" sz="3000" dirty="0">
+              <a:rPr lang="en-US" altLang="ko-KR" sz="3000" dirty="0">
                 <a:solidFill>
                   <a:srgbClr val="1F2937"/>
                 </a:solidFill>

--- a/dist/초3/영어/듣기와말하기/초3_영어_듣기와말하기_02_이름묻고답하기.pptx
+++ b/dist/초3/영어/듣기와말하기/초3_영어_듣기와말하기_02_이름묻고답하기.pptx
@@ -120,20 +120,20 @@
   <p:extLst>
     <p:ext uri="{521415D9-36F7-43E2-AB2F-B90AF26B5E84}">
       <p14:sectionLst xmlns:p14="http://schemas.microsoft.com/office/powerpoint/2010/main">
-        <p14:section name="도입" id="{dc195b36-0c5a-e2a5-e132-f4d4db4ecfcb}">
+        <p14:section name="도입" id="{0cf2e6a7-1b4c-6a30-f741-450645580285}">
           <p14:sldIdLst>
             <p14:sldId id="256"/>
             <p14:sldId id="257"/>
           </p14:sldIdLst>
         </p14:section>
-        <p14:section name="개념" id="{bbf094a3-cdf5-89f5-f3d6-3818c65a692e}">
+        <p14:section name="개념" id="{ebb937d5-0dfb-cceb-9038-bade56e0d391}">
           <p14:sldIdLst>
             <p14:sldId id="258"/>
             <p14:sldId id="259"/>
             <p14:sldId id="260"/>
           </p14:sldIdLst>
         </p14:section>
-        <p14:section name="연습" id="{0f0e1566-e0c2-ae7a-d97b-a2cc18e29c50}">
+        <p14:section name="연습" id="{8d626022-b36b-6633-239b-34eead2dfac9}">
           <p14:sldIdLst>
             <p14:sldId id="261"/>
             <p14:sldId id="262"/>
@@ -141,19 +141,19 @@
             <p14:sldId id="264"/>
           </p14:sldIdLst>
         </p14:section>
-        <p14:section name="확인" id="{1a35846b-8f02-4d71-0548-52db1461e7c1}">
+        <p14:section name="확인" id="{5329ea7e-0815-237a-c82b-0963e69a152f}">
           <p14:sldIdLst>
             <p14:sldId id="265"/>
             <p14:sldId id="266"/>
             <p14:sldId id="267"/>
           </p14:sldIdLst>
         </p14:section>
-        <p14:section name="정리" id="{3349afba-80a6-eae8-c7b7-7281042eaf78}">
+        <p14:section name="정리" id="{f2553600-ec06-2866-4c2e-d315d45ec700}">
           <p14:sldIdLst>
             <p14:sldId id="268"/>
           </p14:sldIdLst>
         </p14:section>
-        <p14:section name="보충" id="{d39dd206-55ad-7973-6425-73e34bf6d6da}">
+        <p14:section name="보충" id="{b8981840-c6ac-6943-cec2-0cc278f86460}">
           <p14:sldIdLst>
             <p14:sldId id="269"/>
           </p14:sldIdLst>

--- a/dist/초3/영어/듣기와말하기/초3_영어_듣기와말하기_02_이름묻고답하기.pptx
+++ b/dist/초3/영어/듣기와말하기/초3_영어_듣기와말하기_02_이름묻고답하기.pptx
@@ -120,20 +120,20 @@
   <p:extLst>
     <p:ext uri="{521415D9-36F7-43E2-AB2F-B90AF26B5E84}">
       <p14:sectionLst xmlns:p14="http://schemas.microsoft.com/office/powerpoint/2010/main">
-        <p14:section name="도입" id="{0cf2e6a7-1b4c-6a30-f741-450645580285}">
+        <p14:section name="도입" id="{b0960c67-3191-398d-9af6-7daad756abf9}">
           <p14:sldIdLst>
             <p14:sldId id="256"/>
             <p14:sldId id="257"/>
           </p14:sldIdLst>
         </p14:section>
-        <p14:section name="개념" id="{ebb937d5-0dfb-cceb-9038-bade56e0d391}">
+        <p14:section name="개념" id="{ea25724f-67ee-7151-3ef0-c1f42c80c99d}">
           <p14:sldIdLst>
             <p14:sldId id="258"/>
             <p14:sldId id="259"/>
             <p14:sldId id="260"/>
           </p14:sldIdLst>
         </p14:section>
-        <p14:section name="연습" id="{8d626022-b36b-6633-239b-34eead2dfac9}">
+        <p14:section name="연습" id="{71892a28-9a87-2463-3bfb-a5aada481789}">
           <p14:sldIdLst>
             <p14:sldId id="261"/>
             <p14:sldId id="262"/>
@@ -141,19 +141,19 @@
             <p14:sldId id="264"/>
           </p14:sldIdLst>
         </p14:section>
-        <p14:section name="확인" id="{5329ea7e-0815-237a-c82b-0963e69a152f}">
+        <p14:section name="확인" id="{ff7cf41c-cebe-5262-8c02-49909e5bd292}">
           <p14:sldIdLst>
             <p14:sldId id="265"/>
             <p14:sldId id="266"/>
             <p14:sldId id="267"/>
           </p14:sldIdLst>
         </p14:section>
-        <p14:section name="정리" id="{f2553600-ec06-2866-4c2e-d315d45ec700}">
+        <p14:section name="정리" id="{8037dd02-d90c-1578-635f-ea747fe9e9f0}">
           <p14:sldIdLst>
             <p14:sldId id="268"/>
           </p14:sldIdLst>
         </p14:section>
-        <p14:section name="보충" id="{b8981840-c6ac-6943-cec2-0cc278f86460}">
+        <p14:section name="보충" id="{a9433151-b1ce-5f85-d13e-f623685660c5}">
           <p14:sldIdLst>
             <p14:sldId id="269"/>
           </p14:sldIdLst>
